--- a/data-eng/decks/w6d5s2.pptx
+++ b/data-eng/decks/w6d5s2.pptx
@@ -3100,7 +3100,7 @@
       <p:grpSpPr/>
       <p:sp>
         <p:nvSpPr>
-          <p:cNvPr id="2" name="Oval 1"/>
+          <p:cNvPr id="2" name="deckgen:decor"/>
           <p:cNvSpPr/>
           <p:nvPr/>
         </p:nvSpPr>
@@ -3130,7 +3130,7 @@
       </p:sp>
       <p:sp>
         <p:nvSpPr>
-          <p:cNvPr id="3" name="Oval 2"/>
+          <p:cNvPr id="3" name="deckgen:decor"/>
           <p:cNvSpPr/>
           <p:nvPr/>
         </p:nvSpPr>
@@ -3160,7 +3160,7 @@
       </p:sp>
       <p:sp>
         <p:nvSpPr>
-          <p:cNvPr id="4" name="Oval 3"/>
+          <p:cNvPr id="4" name="deckgen:decor"/>
           <p:cNvSpPr/>
           <p:nvPr/>
         </p:nvSpPr>
@@ -3190,7 +3190,7 @@
       </p:sp>
       <p:sp>
         <p:nvSpPr>
-          <p:cNvPr id="5" name="Rectangle 4"/>
+          <p:cNvPr id="5" name="deckgen:decor"/>
           <p:cNvSpPr/>
           <p:nvPr/>
         </p:nvSpPr>
@@ -3220,7 +3220,7 @@
       </p:sp>
       <p:sp>
         <p:nvSpPr>
-          <p:cNvPr id="6" name="Oval 5"/>
+          <p:cNvPr id="6" name="deckgen:decor"/>
           <p:cNvSpPr/>
           <p:nvPr/>
         </p:nvSpPr>
@@ -3250,7 +3250,7 @@
       </p:sp>
       <p:sp>
         <p:nvSpPr>
-          <p:cNvPr id="7" name="Oval 6"/>
+          <p:cNvPr id="7" name="deckgen:decor"/>
           <p:cNvSpPr/>
           <p:nvPr/>
         </p:nvSpPr>
@@ -3280,7 +3280,7 @@
       </p:sp>
       <p:sp>
         <p:nvSpPr>
-          <p:cNvPr id="8" name="Oval 7"/>
+          <p:cNvPr id="8" name="deckgen:decor"/>
           <p:cNvSpPr/>
           <p:nvPr/>
         </p:nvSpPr>
@@ -3310,7 +3310,7 @@
       </p:sp>
       <p:sp>
         <p:nvSpPr>
-          <p:cNvPr id="9" name="Oval 8"/>
+          <p:cNvPr id="9" name="deckgen:decor"/>
           <p:cNvSpPr/>
           <p:nvPr/>
         </p:nvSpPr>
@@ -3340,7 +3340,7 @@
       </p:sp>
       <p:sp>
         <p:nvSpPr>
-          <p:cNvPr id="10" name="Rectangle 9"/>
+          <p:cNvPr id="10" name="deckgen:decor"/>
           <p:cNvSpPr/>
           <p:nvPr/>
         </p:nvSpPr>
@@ -3618,7 +3618,7 @@
       <p:grpSpPr/>
       <p:sp>
         <p:nvSpPr>
-          <p:cNvPr id="2" name="Oval 1"/>
+          <p:cNvPr id="2" name="deckgen:decor"/>
           <p:cNvSpPr/>
           <p:nvPr/>
         </p:nvSpPr>
@@ -3648,7 +3648,7 @@
       </p:sp>
       <p:sp>
         <p:nvSpPr>
-          <p:cNvPr id="3" name="Oval 2"/>
+          <p:cNvPr id="3" name="deckgen:decor"/>
           <p:cNvSpPr/>
           <p:nvPr/>
         </p:nvSpPr>
@@ -3678,7 +3678,7 @@
       </p:sp>
       <p:sp>
         <p:nvSpPr>
-          <p:cNvPr id="4" name="Oval 3"/>
+          <p:cNvPr id="4" name="deckgen:decor"/>
           <p:cNvSpPr/>
           <p:nvPr/>
         </p:nvSpPr>
@@ -4901,7 +4901,7 @@
       <p:grpSpPr/>
       <p:sp>
         <p:nvSpPr>
-          <p:cNvPr id="2" name="Oval 1"/>
+          <p:cNvPr id="2" name="deckgen:decor"/>
           <p:cNvSpPr/>
           <p:nvPr/>
         </p:nvSpPr>
@@ -4931,7 +4931,7 @@
       </p:sp>
       <p:sp>
         <p:nvSpPr>
-          <p:cNvPr id="3" name="Oval 2"/>
+          <p:cNvPr id="3" name="deckgen:decor"/>
           <p:cNvSpPr/>
           <p:nvPr/>
         </p:nvSpPr>
@@ -5708,7 +5708,7 @@
       <p:grpSpPr/>
       <p:sp>
         <p:nvSpPr>
-          <p:cNvPr id="2" name="Oval 1"/>
+          <p:cNvPr id="2" name="deckgen:decor"/>
           <p:cNvSpPr/>
           <p:nvPr/>
         </p:nvSpPr>
@@ -5738,7 +5738,7 @@
       </p:sp>
       <p:sp>
         <p:nvSpPr>
-          <p:cNvPr id="3" name="Oval 2"/>
+          <p:cNvPr id="3" name="deckgen:decor"/>
           <p:cNvSpPr/>
           <p:nvPr/>
         </p:nvSpPr>
@@ -5768,7 +5768,7 @@
       </p:sp>
       <p:sp>
         <p:nvSpPr>
-          <p:cNvPr id="4" name="Oval 3"/>
+          <p:cNvPr id="4" name="deckgen:decor"/>
           <p:cNvSpPr/>
           <p:nvPr/>
         </p:nvSpPr>
@@ -6845,7 +6845,7 @@
       <p:grpSpPr/>
       <p:sp>
         <p:nvSpPr>
-          <p:cNvPr id="2" name="Oval 1"/>
+          <p:cNvPr id="2" name="deckgen:decor"/>
           <p:cNvSpPr/>
           <p:nvPr/>
         </p:nvSpPr>
@@ -6875,7 +6875,7 @@
       </p:sp>
       <p:sp>
         <p:nvSpPr>
-          <p:cNvPr id="3" name="Oval 2"/>
+          <p:cNvPr id="3" name="deckgen:decor"/>
           <p:cNvSpPr/>
           <p:nvPr/>
         </p:nvSpPr>
@@ -6905,7 +6905,7 @@
       </p:sp>
       <p:sp>
         <p:nvSpPr>
-          <p:cNvPr id="4" name="Oval 3"/>
+          <p:cNvPr id="4" name="deckgen:decor"/>
           <p:cNvSpPr/>
           <p:nvPr/>
         </p:nvSpPr>
@@ -8038,7 +8038,7 @@
       <p:grpSpPr/>
       <p:sp>
         <p:nvSpPr>
-          <p:cNvPr id="2" name="Oval 1"/>
+          <p:cNvPr id="2" name="deckgen:decor"/>
           <p:cNvSpPr/>
           <p:nvPr/>
         </p:nvSpPr>
@@ -8068,7 +8068,7 @@
       </p:sp>
       <p:sp>
         <p:nvSpPr>
-          <p:cNvPr id="3" name="Oval 2"/>
+          <p:cNvPr id="3" name="deckgen:decor"/>
           <p:cNvSpPr/>
           <p:nvPr/>
         </p:nvSpPr>
@@ -8098,7 +8098,7 @@
       </p:sp>
       <p:sp>
         <p:nvSpPr>
-          <p:cNvPr id="4" name="Oval 3"/>
+          <p:cNvPr id="4" name="deckgen:decor"/>
           <p:cNvSpPr/>
           <p:nvPr/>
         </p:nvSpPr>
@@ -8607,7 +8607,7 @@
                 <a:ea typeface="Pretendard"/>
                 <a:cs typeface="Pretendard"/>
               </a:rPr>
-              <a:t>minio/minio · 9000·9001 · ./plugins/… → /kafka/connect/… 마운트</a:t>
+              <a:t>pgsty/minio · 9000·9001 · ./plugins/… → /kafka/connect/… 마운트</a:t>
             </a:r>
           </a:p>
         </p:txBody>
@@ -9189,7 +9189,7 @@
       <p:grpSpPr/>
       <p:sp>
         <p:nvSpPr>
-          <p:cNvPr id="2" name="Oval 1"/>
+          <p:cNvPr id="2" name="deckgen:decor"/>
           <p:cNvSpPr/>
           <p:nvPr/>
         </p:nvSpPr>
@@ -9219,7 +9219,7 @@
       </p:sp>
       <p:sp>
         <p:nvSpPr>
-          <p:cNvPr id="3" name="Oval 2"/>
+          <p:cNvPr id="3" name="deckgen:decor"/>
           <p:cNvSpPr/>
           <p:nvPr/>
         </p:nvSpPr>
@@ -9249,7 +9249,7 @@
       </p:sp>
       <p:sp>
         <p:nvSpPr>
-          <p:cNvPr id="4" name="Oval 3"/>
+          <p:cNvPr id="4" name="deckgen:decor"/>
           <p:cNvSpPr/>
           <p:nvPr/>
         </p:nvSpPr>
@@ -11350,7 +11350,7 @@
       <p:grpSpPr/>
       <p:sp>
         <p:nvSpPr>
-          <p:cNvPr id="2" name="Oval 1"/>
+          <p:cNvPr id="2" name="deckgen:decor"/>
           <p:cNvSpPr/>
           <p:nvPr/>
         </p:nvSpPr>
@@ -11380,7 +11380,7 @@
       </p:sp>
       <p:sp>
         <p:nvSpPr>
-          <p:cNvPr id="3" name="Oval 2"/>
+          <p:cNvPr id="3" name="deckgen:decor"/>
           <p:cNvSpPr/>
           <p:nvPr/>
         </p:nvSpPr>
@@ -11410,7 +11410,7 @@
       </p:sp>
       <p:sp>
         <p:nvSpPr>
-          <p:cNvPr id="4" name="Oval 3"/>
+          <p:cNvPr id="4" name="deckgen:decor"/>
           <p:cNvSpPr/>
           <p:nvPr/>
         </p:nvSpPr>
@@ -12377,7 +12377,7 @@
       <p:grpSpPr/>
       <p:sp>
         <p:nvSpPr>
-          <p:cNvPr id="2" name="Oval 1"/>
+          <p:cNvPr id="2" name="deckgen:decor"/>
           <p:cNvSpPr/>
           <p:nvPr/>
         </p:nvSpPr>
@@ -12407,7 +12407,7 @@
       </p:sp>
       <p:sp>
         <p:nvSpPr>
-          <p:cNvPr id="3" name="Oval 2"/>
+          <p:cNvPr id="3" name="deckgen:decor"/>
           <p:cNvSpPr/>
           <p:nvPr/>
         </p:nvSpPr>
@@ -12437,7 +12437,7 @@
       </p:sp>
       <p:sp>
         <p:nvSpPr>
-          <p:cNvPr id="4" name="Oval 3"/>
+          <p:cNvPr id="4" name="deckgen:decor"/>
           <p:cNvSpPr/>
           <p:nvPr/>
         </p:nvSpPr>
@@ -13570,7 +13570,7 @@
       <p:grpSpPr/>
       <p:sp>
         <p:nvSpPr>
-          <p:cNvPr id="2" name="Oval 1"/>
+          <p:cNvPr id="2" name="deckgen:decor"/>
           <p:cNvSpPr/>
           <p:nvPr/>
         </p:nvSpPr>
@@ -13600,7 +13600,7 @@
       </p:sp>
       <p:sp>
         <p:nvSpPr>
-          <p:cNvPr id="3" name="Oval 2"/>
+          <p:cNvPr id="3" name="deckgen:decor"/>
           <p:cNvSpPr/>
           <p:nvPr/>
         </p:nvSpPr>
@@ -13630,7 +13630,7 @@
       </p:sp>
       <p:sp>
         <p:nvSpPr>
-          <p:cNvPr id="4" name="Oval 3"/>
+          <p:cNvPr id="4" name="deckgen:decor"/>
           <p:cNvSpPr/>
           <p:nvPr/>
         </p:nvSpPr>
@@ -14631,7 +14631,7 @@
       <p:grpSpPr/>
       <p:sp>
         <p:nvSpPr>
-          <p:cNvPr id="2" name="Oval 1"/>
+          <p:cNvPr id="2" name="deckgen:decor"/>
           <p:cNvSpPr/>
           <p:nvPr/>
         </p:nvSpPr>
@@ -14661,7 +14661,7 @@
       </p:sp>
       <p:sp>
         <p:nvSpPr>
-          <p:cNvPr id="3" name="Oval 2"/>
+          <p:cNvPr id="3" name="deckgen:decor"/>
           <p:cNvSpPr/>
           <p:nvPr/>
         </p:nvSpPr>
@@ -14691,7 +14691,7 @@
       </p:sp>
       <p:sp>
         <p:nvSpPr>
-          <p:cNvPr id="4" name="Oval 3"/>
+          <p:cNvPr id="4" name="deckgen:decor"/>
           <p:cNvSpPr/>
           <p:nvPr/>
         </p:nvSpPr>
@@ -15714,7 +15714,7 @@
                 <a:ea typeface="Pretendard"/>
                 <a:cs typeface="Pretendard"/>
               </a:rPr>
-              <a:t>GetOffsetShell</a:t>
+              <a:t>kafka-get-offsets.sh</a:t>
             </a:r>
           </a:p>
         </p:txBody>

--- a/data-eng/decks/w6d5s2.pptx
+++ b/data-eng/decks/w6d5s2.pptx
@@ -4543,7 +4543,7 @@
                 <a:ea typeface="Pretendard"/>
                 <a:cs typeface="Pretendard"/>
               </a:rPr>
-              <a:t>mc cat 의 after.customer 가 넣은 행과 같다</a:t>
+              <a:t>가장 최근 파일의 c 줄이 방금 넣은 행과 같다</a:t>
             </a:r>
           </a:p>
         </p:txBody>
@@ -4689,7 +4689,7 @@
                 <a:ea typeface="Pretendard"/>
                 <a:cs typeface="Pretendard"/>
               </a:rPr>
-              <a:t>kafka-topics --list 의 여섯 토픽 용도를 설명할 수 있다</a:t>
+              <a:t>kafka-topics --list 의 토픽 아홉의 용도를 설명할 수 있다</a:t>
             </a:r>
           </a:p>
         </p:txBody>
@@ -5154,7 +5154,7 @@
         </p:nvSpPr>
         <p:spPr>
           <a:xfrm>
-            <a:off x="1428750" y="5486400"/>
+            <a:off x="1428750" y="5476875"/>
             <a:ext cx="419100" cy="381000"/>
           </a:xfrm>
           <a:prstGeom prst="rect">
@@ -5195,7 +5195,7 @@
         </p:nvSpPr>
         <p:spPr>
           <a:xfrm>
-            <a:off x="1905000" y="5486400"/>
+            <a:off x="1905000" y="5476875"/>
             <a:ext cx="6724650" cy="381000"/>
           </a:xfrm>
           <a:prstGeom prst="rect">
@@ -5270,7 +5270,7 @@
         </p:nvSpPr>
         <p:spPr>
           <a:xfrm>
-            <a:off x="9658350" y="5486400"/>
+            <a:off x="9658350" y="5476875"/>
             <a:ext cx="419100" cy="381000"/>
           </a:xfrm>
           <a:prstGeom prst="rect">
@@ -5311,7 +5311,7 @@
         </p:nvSpPr>
         <p:spPr>
           <a:xfrm>
-            <a:off x="10134600" y="5486400"/>
+            <a:off x="10134600" y="5476875"/>
             <a:ext cx="6724650" cy="381000"/>
           </a:xfrm>
           <a:prstGeom prst="rect">
@@ -5339,7 +5339,7 @@
                 <a:ea typeface="Pretendard"/>
                 <a:cs typeface="Pretendard"/>
               </a:rPr>
-              <a:t>자주 겪는 오류 네 가지</a:t>
+              <a:t>자주 겪는 오류 다섯 가지</a:t>
             </a:r>
           </a:p>
         </p:txBody>
@@ -5386,7 +5386,7 @@
         </p:nvSpPr>
         <p:spPr>
           <a:xfrm>
-            <a:off x="1428750" y="6515100"/>
+            <a:off x="1428750" y="6505575"/>
             <a:ext cx="419100" cy="381000"/>
           </a:xfrm>
           <a:prstGeom prst="rect">
@@ -5427,7 +5427,7 @@
         </p:nvSpPr>
         <p:spPr>
           <a:xfrm>
-            <a:off x="1905000" y="6515100"/>
+            <a:off x="1905000" y="6505575"/>
             <a:ext cx="6724650" cy="381000"/>
           </a:xfrm>
           <a:prstGeom prst="rect">
@@ -5455,7 +5455,7 @@
                 <a:ea typeface="Pretendard"/>
                 <a:cs typeface="Pretendard"/>
               </a:rPr>
-              <a:t>docker compose stop (down -v 금지)</a:t>
+              <a:t>docker compose stop (down 금지)</a:t>
             </a:r>
           </a:p>
         </p:txBody>
@@ -5502,7 +5502,7 @@
         </p:nvSpPr>
         <p:spPr>
           <a:xfrm>
-            <a:off x="9658350" y="6515100"/>
+            <a:off x="9658350" y="6505575"/>
             <a:ext cx="419100" cy="381000"/>
           </a:xfrm>
           <a:prstGeom prst="rect">
@@ -5543,7 +5543,7 @@
         </p:nvSpPr>
         <p:spPr>
           <a:xfrm>
-            <a:off x="10134600" y="6515100"/>
+            <a:off x="10134600" y="6505575"/>
             <a:ext cx="6724650" cy="381000"/>
           </a:xfrm>
           <a:prstGeom prst="rect">
@@ -7081,7 +7081,7 @@
                 <a:ea typeface="Pretendard"/>
                 <a:cs typeface="Pretendard"/>
               </a:rPr>
-              <a:t>~/data-eng/week6 에서 kafka·mysql·connect 가 떠 있고 mysql-cdc 가 RUNNING 인 상태로 시작합니다</a:t>
+              <a:t>~/data-eng/week6 에서 6-4 스택과 mysql-cdc RUNNING, plugins/ 에 S3 Sink 를 풀어 둔 상태로 시작합니다</a:t>
             </a:r>
           </a:p>
         </p:txBody>
@@ -7227,7 +7227,7 @@
                 <a:ea typeface="Pretendard"/>
                 <a:cs typeface="Pretendard"/>
               </a:rPr>
-              <a:t>zip 풀기</a:t>
+              <a:t>확인만</a:t>
             </a:r>
           </a:p>
           <a:p>
@@ -7245,7 +7245,7 @@
                 <a:ea typeface="Pretendard"/>
                 <a:cs typeface="Pretendard"/>
               </a:rPr>
-              <a:t>plugins/</a:t>
+              <a:t>실습점검에서 받음</a:t>
             </a:r>
           </a:p>
         </p:txBody>
@@ -7391,7 +7391,7 @@
                 <a:ea typeface="Pretendard"/>
                 <a:cs typeface="Pretendard"/>
               </a:rPr>
-              <a:t>compose 추가</a:t>
+              <a:t>compose 통째로</a:t>
             </a:r>
           </a:p>
           <a:p>
@@ -8203,7 +8203,7 @@
                 <a:ea typeface="Pretendard"/>
                 <a:cs typeface="Pretendard"/>
               </a:rPr>
-              <a:t>플러그인 · minio 서비스 · cdc-raw 버킷</a:t>
+              <a:t>플러그인 확인 · compose 다시 쓰기 · 버킷</a:t>
             </a:r>
           </a:p>
         </p:txBody>
@@ -8379,7 +8379,7 @@
                 <a:ea typeface="Pretendard"/>
                 <a:cs typeface="Pretendard"/>
               </a:rPr>
-              <a:t>plugins/ 에 zip 풀기</a:t>
+              <a:t>ls plugins/confluentinc-kafka-connect-s3/lib</a:t>
             </a:r>
           </a:p>
         </p:txBody>
@@ -8420,7 +8420,7 @@
                 <a:ea typeface="Pretendard"/>
                 <a:cs typeface="Pretendard"/>
               </a:rPr>
-              <a:t>plugins/confluentinc-kafka-connect-s3/lib 에 jar 가 보이면 준비 끝</a:t>
+              <a:t>jar 145개 — 판 번호(-12.1.15)가 붙어 있으면 실습점검 3단계의 mv 를 빠뜨린 것</a:t>
             </a:r>
           </a:p>
         </p:txBody>
@@ -8566,7 +8566,7 @@
                 <a:ea typeface="Pretendard"/>
                 <a:cs typeface="Pretendard"/>
               </a:rPr>
-              <a:t>compose 에 minio 서비스 + connect 볼륨</a:t>
+              <a:t>cat &gt; docker-compose.yml &lt;&lt; 'EOF' … EOF</a:t>
             </a:r>
           </a:p>
         </p:txBody>
@@ -8607,7 +8607,7 @@
                 <a:ea typeface="Pretendard"/>
                 <a:cs typeface="Pretendard"/>
               </a:rPr>
-              <a:t>pgsty/minio · 9000·9001 · ./plugins/… → /kafka/connect/… 마운트</a:t>
+              <a:t>조각을 덧붙이면 connect 키가 둘 — 파일 전체를 다시 쓴다</a:t>
             </a:r>
           </a:p>
         </p:txBody>
@@ -8753,7 +8753,7 @@
                 <a:ea typeface="Pretendard"/>
                 <a:cs typeface="Pretendard"/>
               </a:rPr>
-              <a:t>재생성 뒤 플러그인 인식 확인</a:t>
+              <a:t>up -d --force-recreate connect → up -d minio</a:t>
             </a:r>
           </a:p>
         </p:txBody>
@@ -8794,7 +8794,7 @@
                 <a:ea typeface="Pretendard"/>
                 <a:cs typeface="Pretendard"/>
               </a:rPr>
-              <a:t>up -d --force-recreate connect → connector-plugins 에 S3SinkConnector</a:t>
+              <a:t>Container cdc-minio Started · 14초 뒤 connector-plugins 에 S3SinkConnector</a:t>
             </a:r>
           </a:p>
         </p:txBody>
@@ -8940,7 +8940,7 @@
                 <a:ea typeface="Pretendard"/>
                 <a:cs typeface="Pretendard"/>
               </a:rPr>
-              <a:t>cdc-raw 버킷</a:t>
+              <a:t>mc mb -p m/cdc-raw</a:t>
             </a:r>
           </a:p>
         </p:txBody>
@@ -8981,7 +8981,7 @@
                 <a:ea typeface="Pretendard"/>
                 <a:cs typeface="Pretendard"/>
               </a:rPr>
-              <a:t>콘솔 localhost:9001 의 Buckets 또는 mc mb -p m/cdc-raw</a:t>
+              <a:t>Bucket created successfully — 버킷은 커넥터가 만들어 주지 않는다</a:t>
             </a:r>
           </a:p>
         </p:txBody>
@@ -9052,7 +9052,7 @@
                 <a:ea typeface="Pretendard"/>
                 <a:cs typeface="Pretendard"/>
               </a:rPr>
-              <a:t>마운트만 하고 재생성을 안 하면 플러그인이 안 잡힌다 · 9000 충돌이면 4·5주차 MinIO 를 stop · 버킷은 커넥터가 만들어 주지 않는다</a:t>
+              <a:t>컨테이너 이름은 cdc-minio(4주차 minio 와 충돌), 부르는 이름은 서비스 이름 minio 그대로 — store.url 은 http://minio:9000</a:t>
             </a:r>
           </a:p>
         </p:txBody>
@@ -9611,11 +9611,11 @@
         <p:spPr>
           <a:xfrm>
             <a:off x="1143000" y="3448050"/>
-            <a:ext cx="5402580" cy="519793"/>
+            <a:ext cx="5402580" cy="445294"/>
           </a:xfrm>
           <a:prstGeom prst="roundRect">
             <a:avLst>
-              <a:gd name="adj" fmla="val 7329"/>
+              <a:gd name="adj" fmla="val 8556"/>
             </a:avLst>
           </a:prstGeom>
           <a:solidFill>
@@ -9645,7 +9645,7 @@
         <p:spPr>
           <a:xfrm>
             <a:off x="1238250" y="3448050"/>
-            <a:ext cx="5212080" cy="519793"/>
+            <a:ext cx="5212080" cy="445294"/>
           </a:xfrm>
           <a:prstGeom prst="rect">
             <a:avLst/>
@@ -9686,11 +9686,11 @@
         <p:spPr>
           <a:xfrm>
             <a:off x="6583680" y="3448050"/>
-            <a:ext cx="5242560" cy="519793"/>
+            <a:ext cx="5242560" cy="445294"/>
           </a:xfrm>
           <a:prstGeom prst="roundRect">
             <a:avLst>
-              <a:gd name="adj" fmla="val 7329"/>
+              <a:gd name="adj" fmla="val 8556"/>
             </a:avLst>
           </a:prstGeom>
           <a:solidFill>
@@ -9720,7 +9720,7 @@
         <p:spPr>
           <a:xfrm>
             <a:off x="6678930" y="3448050"/>
-            <a:ext cx="5052060" cy="519793"/>
+            <a:ext cx="5052060" cy="445294"/>
           </a:xfrm>
           <a:prstGeom prst="rect">
             <a:avLst/>
@@ -9761,11 +9761,11 @@
         <p:spPr>
           <a:xfrm>
             <a:off x="11864340" y="3448050"/>
-            <a:ext cx="5280660" cy="519793"/>
+            <a:ext cx="5280660" cy="445294"/>
           </a:xfrm>
           <a:prstGeom prst="roundRect">
             <a:avLst>
-              <a:gd name="adj" fmla="val 7329"/>
+              <a:gd name="adj" fmla="val 8556"/>
             </a:avLst>
           </a:prstGeom>
           <a:solidFill>
@@ -9795,7 +9795,7 @@
         <p:spPr>
           <a:xfrm>
             <a:off x="11959590" y="3448050"/>
-            <a:ext cx="5090160" cy="519793"/>
+            <a:ext cx="5090160" cy="445294"/>
           </a:xfrm>
           <a:prstGeom prst="rect">
             <a:avLst/>
@@ -9835,12 +9835,12 @@
         </p:nvSpPr>
         <p:spPr>
           <a:xfrm>
-            <a:off x="1143000" y="4044043"/>
-            <a:ext cx="5402580" cy="519793"/>
+            <a:off x="1143000" y="3969544"/>
+            <a:ext cx="5402580" cy="445294"/>
           </a:xfrm>
           <a:prstGeom prst="roundRect">
             <a:avLst>
-              <a:gd name="adj" fmla="val 7329"/>
+              <a:gd name="adj" fmla="val 8556"/>
             </a:avLst>
           </a:prstGeom>
           <a:solidFill>
@@ -9869,8 +9869,8 @@
         </p:nvSpPr>
         <p:spPr>
           <a:xfrm>
-            <a:off x="1238250" y="4044043"/>
-            <a:ext cx="5212080" cy="519793"/>
+            <a:off x="1238250" y="3969544"/>
+            <a:ext cx="5212080" cy="445294"/>
           </a:xfrm>
           <a:prstGeom prst="rect">
             <a:avLst/>
@@ -9910,12 +9910,12 @@
         </p:nvSpPr>
         <p:spPr>
           <a:xfrm>
-            <a:off x="6583680" y="4044043"/>
-            <a:ext cx="5242560" cy="519793"/>
+            <a:off x="6583680" y="3969544"/>
+            <a:ext cx="5242560" cy="445294"/>
           </a:xfrm>
           <a:prstGeom prst="roundRect">
             <a:avLst>
-              <a:gd name="adj" fmla="val 7329"/>
+              <a:gd name="adj" fmla="val 8556"/>
             </a:avLst>
           </a:prstGeom>
           <a:solidFill>
@@ -9944,8 +9944,8 @@
         </p:nvSpPr>
         <p:spPr>
           <a:xfrm>
-            <a:off x="6678930" y="4044043"/>
-            <a:ext cx="5052060" cy="519793"/>
+            <a:off x="6678930" y="3969544"/>
+            <a:ext cx="5052060" cy="445294"/>
           </a:xfrm>
           <a:prstGeom prst="rect">
             <a:avLst/>
@@ -9985,12 +9985,12 @@
         </p:nvSpPr>
         <p:spPr>
           <a:xfrm>
-            <a:off x="11864340" y="4044043"/>
-            <a:ext cx="5280660" cy="519793"/>
+            <a:off x="11864340" y="3969544"/>
+            <a:ext cx="5280660" cy="445294"/>
           </a:xfrm>
           <a:prstGeom prst="roundRect">
             <a:avLst>
-              <a:gd name="adj" fmla="val 7329"/>
+              <a:gd name="adj" fmla="val 8556"/>
             </a:avLst>
           </a:prstGeom>
           <a:solidFill>
@@ -10019,8 +10019,8 @@
         </p:nvSpPr>
         <p:spPr>
           <a:xfrm>
-            <a:off x="11959590" y="4044043"/>
-            <a:ext cx="5090160" cy="519793"/>
+            <a:off x="11959590" y="3969544"/>
+            <a:ext cx="5090160" cy="445294"/>
           </a:xfrm>
           <a:prstGeom prst="rect">
             <a:avLst/>
@@ -10060,12 +10060,12 @@
         </p:nvSpPr>
         <p:spPr>
           <a:xfrm>
-            <a:off x="1143000" y="4640036"/>
-            <a:ext cx="5402580" cy="519793"/>
+            <a:off x="1143000" y="4491038"/>
+            <a:ext cx="5402580" cy="445294"/>
           </a:xfrm>
           <a:prstGeom prst="roundRect">
             <a:avLst>
-              <a:gd name="adj" fmla="val 7329"/>
+              <a:gd name="adj" fmla="val 8556"/>
             </a:avLst>
           </a:prstGeom>
           <a:solidFill>
@@ -10094,8 +10094,8 @@
         </p:nvSpPr>
         <p:spPr>
           <a:xfrm>
-            <a:off x="1238250" y="4640036"/>
-            <a:ext cx="5212080" cy="519793"/>
+            <a:off x="1238250" y="4491038"/>
+            <a:ext cx="5212080" cy="445294"/>
           </a:xfrm>
           <a:prstGeom prst="rect">
             <a:avLst/>
@@ -10135,12 +10135,12 @@
         </p:nvSpPr>
         <p:spPr>
           <a:xfrm>
-            <a:off x="6583680" y="4640036"/>
-            <a:ext cx="5242560" cy="519793"/>
+            <a:off x="6583680" y="4491038"/>
+            <a:ext cx="5242560" cy="445294"/>
           </a:xfrm>
           <a:prstGeom prst="roundRect">
             <a:avLst>
-              <a:gd name="adj" fmla="val 7329"/>
+              <a:gd name="adj" fmla="val 8556"/>
             </a:avLst>
           </a:prstGeom>
           <a:solidFill>
@@ -10169,8 +10169,8 @@
         </p:nvSpPr>
         <p:spPr>
           <a:xfrm>
-            <a:off x="6678930" y="4640036"/>
-            <a:ext cx="5052060" cy="519793"/>
+            <a:off x="6678930" y="4491038"/>
+            <a:ext cx="5052060" cy="445294"/>
           </a:xfrm>
           <a:prstGeom prst="rect">
             <a:avLst/>
@@ -10210,12 +10210,12 @@
         </p:nvSpPr>
         <p:spPr>
           <a:xfrm>
-            <a:off x="11864340" y="4640036"/>
-            <a:ext cx="5280660" cy="519793"/>
+            <a:off x="11864340" y="4491038"/>
+            <a:ext cx="5280660" cy="445294"/>
           </a:xfrm>
           <a:prstGeom prst="roundRect">
             <a:avLst>
-              <a:gd name="adj" fmla="val 7329"/>
+              <a:gd name="adj" fmla="val 8556"/>
             </a:avLst>
           </a:prstGeom>
           <a:solidFill>
@@ -10244,8 +10244,8 @@
         </p:nvSpPr>
         <p:spPr>
           <a:xfrm>
-            <a:off x="11959590" y="4640036"/>
-            <a:ext cx="5090160" cy="519793"/>
+            <a:off x="11959590" y="4491038"/>
+            <a:ext cx="5090160" cy="445294"/>
           </a:xfrm>
           <a:prstGeom prst="rect">
             <a:avLst/>
@@ -10285,12 +10285,12 @@
         </p:nvSpPr>
         <p:spPr>
           <a:xfrm>
-            <a:off x="1143000" y="5236029"/>
-            <a:ext cx="5402580" cy="519793"/>
+            <a:off x="1143000" y="5012531"/>
+            <a:ext cx="5402580" cy="445294"/>
           </a:xfrm>
           <a:prstGeom prst="roundRect">
             <a:avLst>
-              <a:gd name="adj" fmla="val 7329"/>
+              <a:gd name="adj" fmla="val 8556"/>
             </a:avLst>
           </a:prstGeom>
           <a:solidFill>
@@ -10319,8 +10319,8 @@
         </p:nvSpPr>
         <p:spPr>
           <a:xfrm>
-            <a:off x="1238250" y="5236029"/>
-            <a:ext cx="5212080" cy="519793"/>
+            <a:off x="1238250" y="5012531"/>
+            <a:ext cx="5212080" cy="445294"/>
           </a:xfrm>
           <a:prstGeom prst="rect">
             <a:avLst/>
@@ -10360,12 +10360,12 @@
         </p:nvSpPr>
         <p:spPr>
           <a:xfrm>
-            <a:off x="6583680" y="5236029"/>
-            <a:ext cx="5242560" cy="519793"/>
+            <a:off x="6583680" y="5012531"/>
+            <a:ext cx="5242560" cy="445294"/>
           </a:xfrm>
           <a:prstGeom prst="roundRect">
             <a:avLst>
-              <a:gd name="adj" fmla="val 7329"/>
+              <a:gd name="adj" fmla="val 8556"/>
             </a:avLst>
           </a:prstGeom>
           <a:solidFill>
@@ -10394,8 +10394,8 @@
         </p:nvSpPr>
         <p:spPr>
           <a:xfrm>
-            <a:off x="6678930" y="5236029"/>
-            <a:ext cx="5052060" cy="519793"/>
+            <a:off x="6678930" y="5012531"/>
+            <a:ext cx="5052060" cy="445294"/>
           </a:xfrm>
           <a:prstGeom prst="rect">
             <a:avLst/>
@@ -10435,12 +10435,12 @@
         </p:nvSpPr>
         <p:spPr>
           <a:xfrm>
-            <a:off x="11864340" y="5236029"/>
-            <a:ext cx="5280660" cy="519793"/>
+            <a:off x="11864340" y="5012531"/>
+            <a:ext cx="5280660" cy="445294"/>
           </a:xfrm>
           <a:prstGeom prst="roundRect">
             <a:avLst>
-              <a:gd name="adj" fmla="val 7329"/>
+              <a:gd name="adj" fmla="val 8556"/>
             </a:avLst>
           </a:prstGeom>
           <a:solidFill>
@@ -10469,8 +10469,8 @@
         </p:nvSpPr>
         <p:spPr>
           <a:xfrm>
-            <a:off x="11959590" y="5236029"/>
-            <a:ext cx="5090160" cy="519793"/>
+            <a:off x="11959590" y="5012531"/>
+            <a:ext cx="5090160" cy="445294"/>
           </a:xfrm>
           <a:prstGeom prst="rect">
             <a:avLst/>
@@ -10510,12 +10510,12 @@
         </p:nvSpPr>
         <p:spPr>
           <a:xfrm>
-            <a:off x="1143000" y="5832021"/>
-            <a:ext cx="5402580" cy="519793"/>
+            <a:off x="1143000" y="5534025"/>
+            <a:ext cx="5402580" cy="445294"/>
           </a:xfrm>
           <a:prstGeom prst="roundRect">
             <a:avLst>
-              <a:gd name="adj" fmla="val 7329"/>
+              <a:gd name="adj" fmla="val 8556"/>
             </a:avLst>
           </a:prstGeom>
           <a:solidFill>
@@ -10544,8 +10544,8 @@
         </p:nvSpPr>
         <p:spPr>
           <a:xfrm>
-            <a:off x="1238250" y="5832021"/>
-            <a:ext cx="5212080" cy="519793"/>
+            <a:off x="1238250" y="5534025"/>
+            <a:ext cx="5212080" cy="445294"/>
           </a:xfrm>
           <a:prstGeom prst="rect">
             <a:avLst/>
@@ -10585,12 +10585,12 @@
         </p:nvSpPr>
         <p:spPr>
           <a:xfrm>
-            <a:off x="6583680" y="5832021"/>
-            <a:ext cx="5242560" cy="519793"/>
+            <a:off x="6583680" y="5534025"/>
+            <a:ext cx="5242560" cy="445294"/>
           </a:xfrm>
           <a:prstGeom prst="roundRect">
             <a:avLst>
-              <a:gd name="adj" fmla="val 7329"/>
+              <a:gd name="adj" fmla="val 8556"/>
             </a:avLst>
           </a:prstGeom>
           <a:solidFill>
@@ -10619,8 +10619,8 @@
         </p:nvSpPr>
         <p:spPr>
           <a:xfrm>
-            <a:off x="6678930" y="5832021"/>
-            <a:ext cx="5052060" cy="519793"/>
+            <a:off x="6678930" y="5534025"/>
+            <a:ext cx="5052060" cy="445294"/>
           </a:xfrm>
           <a:prstGeom prst="rect">
             <a:avLst/>
@@ -10660,12 +10660,12 @@
         </p:nvSpPr>
         <p:spPr>
           <a:xfrm>
-            <a:off x="11864340" y="5832021"/>
-            <a:ext cx="5280660" cy="519793"/>
+            <a:off x="11864340" y="5534025"/>
+            <a:ext cx="5280660" cy="445294"/>
           </a:xfrm>
           <a:prstGeom prst="roundRect">
             <a:avLst>
-              <a:gd name="adj" fmla="val 7329"/>
+              <a:gd name="adj" fmla="val 8556"/>
             </a:avLst>
           </a:prstGeom>
           <a:solidFill>
@@ -10694,8 +10694,8 @@
         </p:nvSpPr>
         <p:spPr>
           <a:xfrm>
-            <a:off x="11959590" y="5832021"/>
-            <a:ext cx="5090160" cy="519793"/>
+            <a:off x="11959590" y="5534025"/>
+            <a:ext cx="5090160" cy="445294"/>
           </a:xfrm>
           <a:prstGeom prst="rect">
             <a:avLst/>
@@ -10735,12 +10735,12 @@
         </p:nvSpPr>
         <p:spPr>
           <a:xfrm>
-            <a:off x="1143000" y="6428014"/>
-            <a:ext cx="5402580" cy="519793"/>
+            <a:off x="1143000" y="6055519"/>
+            <a:ext cx="5402580" cy="445294"/>
           </a:xfrm>
           <a:prstGeom prst="roundRect">
             <a:avLst>
-              <a:gd name="adj" fmla="val 7329"/>
+              <a:gd name="adj" fmla="val 8556"/>
             </a:avLst>
           </a:prstGeom>
           <a:solidFill>
@@ -10769,8 +10769,8 @@
         </p:nvSpPr>
         <p:spPr>
           <a:xfrm>
-            <a:off x="1238250" y="6428014"/>
-            <a:ext cx="5212080" cy="519793"/>
+            <a:off x="1238250" y="6055519"/>
+            <a:ext cx="5212080" cy="445294"/>
           </a:xfrm>
           <a:prstGeom prst="rect">
             <a:avLst/>
@@ -10810,12 +10810,12 @@
         </p:nvSpPr>
         <p:spPr>
           <a:xfrm>
-            <a:off x="6583680" y="6428014"/>
-            <a:ext cx="5242560" cy="519793"/>
+            <a:off x="6583680" y="6055519"/>
+            <a:ext cx="5242560" cy="445294"/>
           </a:xfrm>
           <a:prstGeom prst="roundRect">
             <a:avLst>
-              <a:gd name="adj" fmla="val 7329"/>
+              <a:gd name="adj" fmla="val 8556"/>
             </a:avLst>
           </a:prstGeom>
           <a:solidFill>
@@ -10844,8 +10844,8 @@
         </p:nvSpPr>
         <p:spPr>
           <a:xfrm>
-            <a:off x="6678930" y="6428014"/>
-            <a:ext cx="5052060" cy="519793"/>
+            <a:off x="6678930" y="6055519"/>
+            <a:ext cx="5052060" cy="445294"/>
           </a:xfrm>
           <a:prstGeom prst="rect">
             <a:avLst/>
@@ -10885,12 +10885,12 @@
         </p:nvSpPr>
         <p:spPr>
           <a:xfrm>
-            <a:off x="11864340" y="6428014"/>
-            <a:ext cx="5280660" cy="519793"/>
+            <a:off x="11864340" y="6055519"/>
+            <a:ext cx="5280660" cy="445294"/>
           </a:xfrm>
           <a:prstGeom prst="roundRect">
             <a:avLst>
-              <a:gd name="adj" fmla="val 7329"/>
+              <a:gd name="adj" fmla="val 8556"/>
             </a:avLst>
           </a:prstGeom>
           <a:solidFill>
@@ -10919,8 +10919,8 @@
         </p:nvSpPr>
         <p:spPr>
           <a:xfrm>
-            <a:off x="11959590" y="6428014"/>
-            <a:ext cx="5090160" cy="519793"/>
+            <a:off x="11959590" y="6055519"/>
+            <a:ext cx="5090160" cy="445294"/>
           </a:xfrm>
           <a:prstGeom prst="rect">
             <a:avLst/>
@@ -10960,12 +10960,12 @@
         </p:nvSpPr>
         <p:spPr>
           <a:xfrm>
-            <a:off x="1143000" y="7024007"/>
-            <a:ext cx="5402580" cy="519793"/>
+            <a:off x="1143000" y="6577012"/>
+            <a:ext cx="5402580" cy="445294"/>
           </a:xfrm>
           <a:prstGeom prst="roundRect">
             <a:avLst>
-              <a:gd name="adj" fmla="val 7329"/>
+              <a:gd name="adj" fmla="val 8556"/>
             </a:avLst>
           </a:prstGeom>
           <a:solidFill>
@@ -10994,8 +10994,8 @@
         </p:nvSpPr>
         <p:spPr>
           <a:xfrm>
-            <a:off x="1238250" y="7024007"/>
-            <a:ext cx="5212080" cy="519793"/>
+            <a:off x="1238250" y="6577012"/>
+            <a:ext cx="5212080" cy="445294"/>
           </a:xfrm>
           <a:prstGeom prst="rect">
             <a:avLst/>
@@ -11035,12 +11035,12 @@
         </p:nvSpPr>
         <p:spPr>
           <a:xfrm>
-            <a:off x="6583680" y="7024007"/>
-            <a:ext cx="5242560" cy="519793"/>
+            <a:off x="6583680" y="6577012"/>
+            <a:ext cx="5242560" cy="445294"/>
           </a:xfrm>
           <a:prstGeom prst="roundRect">
             <a:avLst>
-              <a:gd name="adj" fmla="val 7329"/>
+              <a:gd name="adj" fmla="val 8556"/>
             </a:avLst>
           </a:prstGeom>
           <a:solidFill>
@@ -11069,8 +11069,8 @@
         </p:nvSpPr>
         <p:spPr>
           <a:xfrm>
-            <a:off x="6678930" y="7024007"/>
-            <a:ext cx="5052060" cy="519793"/>
+            <a:off x="6678930" y="6577012"/>
+            <a:ext cx="5052060" cy="445294"/>
           </a:xfrm>
           <a:prstGeom prst="rect">
             <a:avLst/>
@@ -11110,12 +11110,12 @@
         </p:nvSpPr>
         <p:spPr>
           <a:xfrm>
-            <a:off x="11864340" y="7024007"/>
-            <a:ext cx="5280660" cy="519793"/>
+            <a:off x="11864340" y="6577012"/>
+            <a:ext cx="5280660" cy="445294"/>
           </a:xfrm>
           <a:prstGeom prst="roundRect">
             <a:avLst>
-              <a:gd name="adj" fmla="val 7329"/>
+              <a:gd name="adj" fmla="val 8556"/>
             </a:avLst>
           </a:prstGeom>
           <a:solidFill>
@@ -11144,8 +11144,8 @@
         </p:nvSpPr>
         <p:spPr>
           <a:xfrm>
-            <a:off x="11959590" y="7024007"/>
-            <a:ext cx="5090160" cy="519793"/>
+            <a:off x="11959590" y="6577012"/>
+            <a:ext cx="5090160" cy="445294"/>
           </a:xfrm>
           <a:prstGeom prst="rect">
             <a:avLst/>
@@ -11179,7 +11179,232 @@
       </p:sp>
       <p:sp>
         <p:nvSpPr>
-          <p:cNvPr id="56" name="TextBox 55"/>
+          <p:cNvPr id="56" name="Rounded Rectangle 55"/>
+          <p:cNvSpPr/>
+          <p:nvPr/>
+        </p:nvSpPr>
+        <p:spPr>
+          <a:xfrm>
+            <a:off x="1143000" y="7098506"/>
+            <a:ext cx="5402580" cy="445294"/>
+          </a:xfrm>
+          <a:prstGeom prst="roundRect">
+            <a:avLst>
+              <a:gd name="adj" fmla="val 8556"/>
+            </a:avLst>
+          </a:prstGeom>
+          <a:solidFill>
+            <a:srgbClr val="EDF3FD"/>
+          </a:solidFill>
+          <a:ln w="9525">
+            <a:solidFill>
+              <a:srgbClr val="BFD3F5"/>
+            </a:solidFill>
+          </a:ln>
+          <a:effectLst/>
+        </p:spPr>
+        <p:txBody>
+          <a:bodyPr rtlCol="0" anchor="ctr" wrap="square"/>
+          <a:lstStyle/>
+          <a:p>
+            <a:pPr algn="ctr"/>
+          </a:p>
+        </p:txBody>
+      </p:sp>
+      <p:sp>
+        <p:nvSpPr>
+          <p:cNvPr id="57" name="TextBox 56"/>
+          <p:cNvSpPr txBox="1"/>
+          <p:nvPr/>
+        </p:nvSpPr>
+        <p:spPr>
+          <a:xfrm>
+            <a:off x="1238250" y="7098506"/>
+            <a:ext cx="5212080" cy="445294"/>
+          </a:xfrm>
+          <a:prstGeom prst="rect">
+            <a:avLst/>
+          </a:prstGeom>
+          <a:noFill/>
+        </p:spPr>
+        <p:txBody>
+          <a:bodyPr wrap="square" lIns="0" rIns="0" tIns="0" bIns="0" anchor="ctr">
+            <a:spAutoFit/>
+          </a:bodyPr>
+          <a:lstStyle/>
+          <a:p>
+            <a:pPr algn="l">
+              <a:lnSpc>
+                <a:spcPct val="115000"/>
+              </a:lnSpc>
+            </a:pPr>
+            <a:r>
+              <a:rPr sz="1875" b="1">
+                <a:solidFill>
+                  <a:srgbClr val="0D2B5E"/>
+                </a:solidFill>
+                <a:latin typeface="Pretendard"/>
+                <a:ea typeface="Pretendard"/>
+                <a:cs typeface="Pretendard"/>
+              </a:rPr>
+              <a:t>behavior.on.null.values</a:t>
+            </a:r>
+          </a:p>
+        </p:txBody>
+      </p:sp>
+      <p:sp>
+        <p:nvSpPr>
+          <p:cNvPr id="58" name="Rounded Rectangle 57"/>
+          <p:cNvSpPr/>
+          <p:nvPr/>
+        </p:nvSpPr>
+        <p:spPr>
+          <a:xfrm>
+            <a:off x="6583680" y="7098506"/>
+            <a:ext cx="5242560" cy="445294"/>
+          </a:xfrm>
+          <a:prstGeom prst="roundRect">
+            <a:avLst>
+              <a:gd name="adj" fmla="val 8556"/>
+            </a:avLst>
+          </a:prstGeom>
+          <a:solidFill>
+            <a:srgbClr val="FAFBFD"/>
+          </a:solidFill>
+          <a:ln w="9525">
+            <a:solidFill>
+              <a:srgbClr val="DCE1E8"/>
+            </a:solidFill>
+          </a:ln>
+          <a:effectLst/>
+        </p:spPr>
+        <p:txBody>
+          <a:bodyPr rtlCol="0" anchor="ctr" wrap="square"/>
+          <a:lstStyle/>
+          <a:p>
+            <a:pPr algn="ctr"/>
+          </a:p>
+        </p:txBody>
+      </p:sp>
+      <p:sp>
+        <p:nvSpPr>
+          <p:cNvPr id="59" name="TextBox 58"/>
+          <p:cNvSpPr txBox="1"/>
+          <p:nvPr/>
+        </p:nvSpPr>
+        <p:spPr>
+          <a:xfrm>
+            <a:off x="6678930" y="7098506"/>
+            <a:ext cx="5052060" cy="445294"/>
+          </a:xfrm>
+          <a:prstGeom prst="rect">
+            <a:avLst/>
+          </a:prstGeom>
+          <a:noFill/>
+        </p:spPr>
+        <p:txBody>
+          <a:bodyPr wrap="square" lIns="0" rIns="0" tIns="0" bIns="0" anchor="ctr">
+            <a:spAutoFit/>
+          </a:bodyPr>
+          <a:lstStyle/>
+          <a:p>
+            <a:pPr algn="ctr">
+              <a:lnSpc>
+                <a:spcPct val="115000"/>
+              </a:lnSpc>
+            </a:pPr>
+            <a:r>
+              <a:rPr sz="1875" b="0">
+                <a:solidFill>
+                  <a:srgbClr val="3D3D3D"/>
+                </a:solidFill>
+                <a:latin typeface="Pretendard"/>
+                <a:ea typeface="Pretendard"/>
+                <a:cs typeface="Pretendard"/>
+              </a:rPr>
+              <a:t>ignore</a:t>
+            </a:r>
+          </a:p>
+        </p:txBody>
+      </p:sp>
+      <p:sp>
+        <p:nvSpPr>
+          <p:cNvPr id="60" name="Rounded Rectangle 59"/>
+          <p:cNvSpPr/>
+          <p:nvPr/>
+        </p:nvSpPr>
+        <p:spPr>
+          <a:xfrm>
+            <a:off x="11864340" y="7098506"/>
+            <a:ext cx="5280660" cy="445294"/>
+          </a:xfrm>
+          <a:prstGeom prst="roundRect">
+            <a:avLst>
+              <a:gd name="adj" fmla="val 8556"/>
+            </a:avLst>
+          </a:prstGeom>
+          <a:solidFill>
+            <a:srgbClr val="FAFBFD"/>
+          </a:solidFill>
+          <a:ln w="9525">
+            <a:solidFill>
+              <a:srgbClr val="DCE1E8"/>
+            </a:solidFill>
+          </a:ln>
+          <a:effectLst/>
+        </p:spPr>
+        <p:txBody>
+          <a:bodyPr rtlCol="0" anchor="ctr" wrap="square"/>
+          <a:lstStyle/>
+          <a:p>
+            <a:pPr algn="ctr"/>
+          </a:p>
+        </p:txBody>
+      </p:sp>
+      <p:sp>
+        <p:nvSpPr>
+          <p:cNvPr id="61" name="TextBox 60"/>
+          <p:cNvSpPr txBox="1"/>
+          <p:nvPr/>
+        </p:nvSpPr>
+        <p:spPr>
+          <a:xfrm>
+            <a:off x="11959590" y="7098506"/>
+            <a:ext cx="5090160" cy="445294"/>
+          </a:xfrm>
+          <a:prstGeom prst="rect">
+            <a:avLst/>
+          </a:prstGeom>
+          <a:noFill/>
+        </p:spPr>
+        <p:txBody>
+          <a:bodyPr wrap="square" lIns="0" rIns="0" tIns="0" bIns="0" anchor="ctr">
+            <a:spAutoFit/>
+          </a:bodyPr>
+          <a:lstStyle/>
+          <a:p>
+            <a:pPr algn="ctr">
+              <a:lnSpc>
+                <a:spcPct val="115000"/>
+              </a:lnSpc>
+            </a:pPr>
+            <a:r>
+              <a:rPr sz="1875" b="0">
+                <a:solidFill>
+                  <a:srgbClr val="3D3D3D"/>
+                </a:solidFill>
+                <a:latin typeface="Pretendard"/>
+                <a:ea typeface="Pretendard"/>
+                <a:cs typeface="Pretendard"/>
+              </a:rPr>
+              <a:t>툼스톤만 건너뛴다</a:t>
+            </a:r>
+          </a:p>
+        </p:txBody>
+      </p:sp>
+      <p:sp>
+        <p:nvSpPr>
+          <p:cNvPr id="62" name="TextBox 61"/>
           <p:cNvSpPr txBox="1"/>
           <p:nvPr/>
         </p:nvSpPr>
@@ -11213,14 +11438,14 @@
                 <a:ea typeface="Pretendard"/>
                 <a:cs typeface="Pretendard"/>
               </a:rPr>
-              <a:t>POST 뒤 …/connectors/minio-sink/status 에서 connector.state 와 tasks[0].state 둘 다 RUNNING 이면 성공</a:t>
-            </a:r>
-          </a:p>
-        </p:txBody>
-      </p:sp>
-      <p:sp>
-        <p:nvSpPr>
-          <p:cNvPr id="57" name="Rectangle 56"/>
+              <a:t>등록하자마자 6-4 이벤트(실측 12건)부터 읽어 5건씩 파일 둘 — status 의 connector · tasks[0] 가 RUNNING</a:t>
+            </a:r>
+          </a:p>
+        </p:txBody>
+      </p:sp>
+      <p:sp>
+        <p:nvSpPr>
+          <p:cNvPr id="63" name="Rectangle 62"/>
           <p:cNvSpPr/>
           <p:nvPr/>
         </p:nvSpPr>
@@ -11250,7 +11475,7 @@
       </p:sp>
       <p:sp>
         <p:nvSpPr>
-          <p:cNvPr id="58" name="TextBox 57"/>
+          <p:cNvPr id="64" name="TextBox 63"/>
           <p:cNvSpPr txBox="1"/>
           <p:nvPr/>
         </p:nvSpPr>
@@ -11291,7 +11516,7 @@
       </p:sp>
       <p:sp>
         <p:nvSpPr>
-          <p:cNvPr id="59" name="TextBox 58"/>
+          <p:cNvPr id="65" name="TextBox 64"/>
           <p:cNvSpPr txBox="1"/>
           <p:nvPr/>
         </p:nvSpPr>
@@ -11515,7 +11740,7 @@
                 <a:ea typeface="Pretendard"/>
                 <a:cs typeface="Pretendard"/>
               </a:rPr>
-              <a:t>INSERT 5건이 파일 하나로 떨어진다</a:t>
+              <a:t>INSERT 5건 뒤 파일 셋 — 마지막이 방금 넣은 것</a:t>
             </a:r>
           </a:p>
         </p:txBody>
@@ -11691,7 +11916,7 @@
                 <a:ea typeface="Pretendard"/>
                 <a:cs typeface="Pretendard"/>
               </a:rPr>
-              <a:t>MySQL 에 INSERT 5건</a:t>
+              <a:t>INSERT 5건 → sleep 10 → mc ls --recursive m/cdc-raw</a:t>
             </a:r>
           </a:p>
         </p:txBody>
@@ -11732,7 +11957,7 @@
                 <a:ea typeface="Pretendard"/>
                 <a:cs typeface="Pretendard"/>
               </a:rPr>
-              <a:t>docker exec mysql mysql … INSERT INTO orders (customer, amount) VALUES … 5행</a:t>
+              <a:t>…+0000000000 · …0006 · …0011.json — 앞 둘은 6-4 의 이벤트</a:t>
             </a:r>
           </a:p>
         </p:txBody>
@@ -11878,7 +12103,7 @@
                 <a:ea typeface="Pretendard"/>
                 <a:cs typeface="Pretendard"/>
               </a:rPr>
-              <a:t>sleep 10 뒤 mc ls --recursive m/cdc-raw</a:t>
+              <a:t>0 → 6 처럼 5씩이 아닌 곳</a:t>
             </a:r>
           </a:p>
         </p:txBody>
@@ -11919,7 +12144,7 @@
                 <a:ea typeface="Pretendard"/>
                 <a:cs typeface="Pretendard"/>
               </a:rPr>
-              <a:t>topics/shop.shop.orders/partition=0/ 아래 JSON 이 보이면 성공</a:t>
+              <a:t>끝 숫자는 첫 메시지의 오프셋 — 툼스톤을 건너뛴 자리</a:t>
             </a:r>
           </a:p>
         </p:txBody>
@@ -12065,7 +12290,7 @@
                 <a:ea typeface="Pretendard"/>
                 <a:cs typeface="Pretendard"/>
               </a:rPr>
-              <a:t>mc cat 으로 파일 열기</a:t>
+              <a:t>mc find … | tail -n 1 → python3</a:t>
             </a:r>
           </a:p>
         </p:txBody>
@@ -12106,7 +12331,7 @@
                 <a:ea typeface="Pretendard"/>
                 <a:cs typeface="Pretendard"/>
               </a:rPr>
-              <a:t>Debezium 이벤트 그대로 — after.customer 가 넣은 행과 같아야 한다</a:t>
+              <a:t>가장 최근 파일의 op 와 after — 방금 넣은 행이 c 로 나온다</a:t>
             </a:r>
           </a:p>
         </p:txBody>
@@ -12119,12 +12344,199 @@
         </p:nvSpPr>
         <p:spPr>
           <a:xfrm>
-            <a:off x="13144500" y="2933700"/>
-            <a:ext cx="4000500" cy="3629025"/>
+            <a:off x="1143000" y="6734175"/>
+            <a:ext cx="11430000" cy="1095375"/>
           </a:xfrm>
           <a:prstGeom prst="roundRect">
             <a:avLst>
-              <a:gd name="adj" fmla="val 1312"/>
+              <a:gd name="adj" fmla="val 4347"/>
+            </a:avLst>
+          </a:prstGeom>
+          <a:solidFill>
+            <a:srgbClr val="FAFBFD"/>
+          </a:solidFill>
+          <a:ln w="9525">
+            <a:solidFill>
+              <a:srgbClr val="DCE1E8"/>
+            </a:solidFill>
+          </a:ln>
+          <a:effectLst/>
+        </p:spPr>
+        <p:txBody>
+          <a:bodyPr rtlCol="0" anchor="ctr" wrap="square"/>
+          <a:lstStyle/>
+          <a:p>
+            <a:pPr algn="ctr"/>
+          </a:p>
+        </p:txBody>
+      </p:sp>
+      <p:sp>
+        <p:nvSpPr>
+          <p:cNvPr id="24" name="Oval 23"/>
+          <p:cNvSpPr/>
+          <p:nvPr/>
+        </p:nvSpPr>
+        <p:spPr>
+          <a:xfrm>
+            <a:off x="1447800" y="6981825"/>
+            <a:ext cx="590550" cy="590550"/>
+          </a:xfrm>
+          <a:prstGeom prst="ellipse">
+            <a:avLst/>
+          </a:prstGeom>
+          <a:solidFill>
+            <a:srgbClr val="0D2B5E"/>
+          </a:solidFill>
+          <a:ln>
+            <a:noFill/>
+          </a:ln>
+          <a:effectLst/>
+        </p:spPr>
+        <p:txBody>
+          <a:bodyPr rtlCol="0" anchor="ctr" wrap="square"/>
+          <a:lstStyle/>
+          <a:p>
+            <a:pPr algn="ctr"/>
+          </a:p>
+        </p:txBody>
+      </p:sp>
+      <p:sp>
+        <p:nvSpPr>
+          <p:cNvPr id="25" name="TextBox 24"/>
+          <p:cNvSpPr txBox="1"/>
+          <p:nvPr/>
+        </p:nvSpPr>
+        <p:spPr>
+          <a:xfrm>
+            <a:off x="1447800" y="7134225"/>
+            <a:ext cx="590550" cy="323850"/>
+          </a:xfrm>
+          <a:prstGeom prst="rect">
+            <a:avLst/>
+          </a:prstGeom>
+          <a:noFill/>
+        </p:spPr>
+        <p:txBody>
+          <a:bodyPr wrap="square" lIns="0" rIns="0" tIns="0" bIns="0" anchor="t">
+            <a:spAutoFit/>
+          </a:bodyPr>
+          <a:lstStyle/>
+          <a:p>
+            <a:pPr algn="ctr">
+              <a:lnSpc>
+                <a:spcPct val="100000"/>
+              </a:lnSpc>
+            </a:pPr>
+            <a:r>
+              <a:rPr sz="2250" b="1">
+                <a:solidFill>
+                  <a:srgbClr val="FFFFFF"/>
+                </a:solidFill>
+                <a:latin typeface="Pretendard"/>
+                <a:ea typeface="Pretendard"/>
+                <a:cs typeface="Pretendard"/>
+              </a:rPr>
+              <a:t>4</a:t>
+            </a:r>
+          </a:p>
+        </p:txBody>
+      </p:sp>
+      <p:sp>
+        <p:nvSpPr>
+          <p:cNvPr id="26" name="TextBox 25"/>
+          <p:cNvSpPr txBox="1"/>
+          <p:nvPr/>
+        </p:nvSpPr>
+        <p:spPr>
+          <a:xfrm>
+            <a:off x="2324100" y="6943725"/>
+            <a:ext cx="9906000" cy="400050"/>
+          </a:xfrm>
+          <a:prstGeom prst="rect">
+            <a:avLst/>
+          </a:prstGeom>
+          <a:noFill/>
+        </p:spPr>
+        <p:txBody>
+          <a:bodyPr wrap="square" lIns="0" rIns="0" tIns="0" bIns="0" anchor="t">
+            <a:spAutoFit/>
+          </a:bodyPr>
+          <a:lstStyle/>
+          <a:p>
+            <a:pPr algn="l">
+              <a:lnSpc>
+                <a:spcPct val="110000"/>
+              </a:lnSpc>
+            </a:pPr>
+            <a:r>
+              <a:rPr sz="2475" b="1">
+                <a:solidFill>
+                  <a:srgbClr val="0D2B5E"/>
+                </a:solidFill>
+                <a:latin typeface="Pretendard"/>
+                <a:ea typeface="Pretendard"/>
+                <a:cs typeface="Pretendard"/>
+              </a:rPr>
+              <a:t>다섯 번째 INSERT 는 아직 없다</a:t>
+            </a:r>
+          </a:p>
+        </p:txBody>
+      </p:sp>
+      <p:sp>
+        <p:nvSpPr>
+          <p:cNvPr id="27" name="TextBox 26"/>
+          <p:cNvSpPr txBox="1"/>
+          <p:nvPr/>
+        </p:nvSpPr>
+        <p:spPr>
+          <a:xfrm>
+            <a:off x="2324100" y="7343775"/>
+            <a:ext cx="9906000" cy="361950"/>
+          </a:xfrm>
+          <a:prstGeom prst="rect">
+            <a:avLst/>
+          </a:prstGeom>
+          <a:noFill/>
+        </p:spPr>
+        <p:txBody>
+          <a:bodyPr wrap="square" lIns="0" rIns="0" tIns="0" bIns="0" anchor="t">
+            <a:spAutoFit/>
+          </a:bodyPr>
+          <a:lstStyle/>
+          <a:p>
+            <a:pPr algn="l">
+              <a:lnSpc>
+                <a:spcPct val="120000"/>
+              </a:lnSpc>
+            </a:pPr>
+            <a:r>
+              <a:rPr sz="2025" b="0">
+                <a:solidFill>
+                  <a:srgbClr val="3D3D3D"/>
+                </a:solidFill>
+                <a:latin typeface="Pretendard"/>
+                <a:ea typeface="Pretendard"/>
+                <a:cs typeface="Pretendard"/>
+              </a:rPr>
+              <a:t>다음 다섯 건이 모일 때까지 Sink 가 들고 있다</a:t>
+            </a:r>
+          </a:p>
+        </p:txBody>
+      </p:sp>
+      <p:sp>
+        <p:nvSpPr>
+          <p:cNvPr id="28" name="Rounded Rectangle 27"/>
+          <p:cNvSpPr/>
+          <p:nvPr/>
+        </p:nvSpPr>
+        <p:spPr>
+          <a:xfrm>
+            <a:off x="13144500" y="2933700"/>
+            <a:ext cx="4000500" cy="4895850"/>
+          </a:xfrm>
+          <a:prstGeom prst="roundRect">
+            <a:avLst>
+              <a:gd name="adj" fmla="val 1190"/>
             </a:avLst>
           </a:prstGeom>
           <a:solidFill>
@@ -12147,13 +12559,13 @@
       </p:sp>
       <p:sp>
         <p:nvSpPr>
-          <p:cNvPr id="24" name="TextBox 23"/>
-          <p:cNvSpPr txBox="1"/>
-          <p:nvPr/>
-        </p:nvSpPr>
-        <p:spPr>
-          <a:xfrm>
-            <a:off x="13487400" y="3929062"/>
+          <p:cNvPr id="29" name="TextBox 28"/>
+          <p:cNvSpPr txBox="1"/>
+          <p:nvPr/>
+        </p:nvSpPr>
+        <p:spPr>
+          <a:xfrm>
+            <a:off x="13487400" y="4562475"/>
             <a:ext cx="3314700" cy="304800"/>
           </a:xfrm>
           <a:prstGeom prst="rect">
@@ -12181,20 +12593,20 @@
                 <a:ea typeface="Pretendard"/>
                 <a:cs typeface="Pretendard"/>
               </a:rPr>
-              <a:t>안 보이면</a:t>
-            </a:r>
-          </a:p>
-        </p:txBody>
-      </p:sp>
-      <p:sp>
-        <p:nvSpPr>
-          <p:cNvPr id="25" name="TextBox 24"/>
-          <p:cNvSpPr txBox="1"/>
-          <p:nvPr/>
-        </p:nvSpPr>
-        <p:spPr>
-          <a:xfrm>
-            <a:off x="13487400" y="4329112"/>
+              <a:t>mc 이미지</a:t>
+            </a:r>
+          </a:p>
+        </p:txBody>
+      </p:sp>
+      <p:sp>
+        <p:nvSpPr>
+          <p:cNvPr id="30" name="TextBox 29"/>
+          <p:cNvSpPr txBox="1"/>
+          <p:nvPr/>
+        </p:nvSpPr>
+        <p:spPr>
+          <a:xfrm>
+            <a:off x="13487400" y="4962525"/>
             <a:ext cx="3314700" cy="1238250"/>
           </a:xfrm>
           <a:prstGeom prst="rect">
@@ -12222,7 +12634,7 @@
                 <a:ea typeface="Pretendard"/>
                 <a:cs typeface="Pretendard"/>
               </a:rPr>
-              <a:t>5건 미달</a:t>
+              <a:t>awk·grep 없음</a:t>
             </a:r>
           </a:p>
           <a:p>
@@ -12240,14 +12652,14 @@
                 <a:ea typeface="Pretendard"/>
                 <a:cs typeface="Pretendard"/>
               </a:rPr>
-              <a:t>INSERT 더</a:t>
-            </a:r>
-          </a:p>
-        </p:txBody>
-      </p:sp>
-      <p:sp>
-        <p:nvSpPr>
-          <p:cNvPr id="26" name="Rectangle 25"/>
+              <a:t>tail 은 있음</a:t>
+            </a:r>
+          </a:p>
+        </p:txBody>
+      </p:sp>
+      <p:sp>
+        <p:nvSpPr>
+          <p:cNvPr id="31" name="Rectangle 30"/>
           <p:cNvSpPr/>
           <p:nvPr/>
         </p:nvSpPr>
@@ -12277,7 +12689,7 @@
       </p:sp>
       <p:sp>
         <p:nvSpPr>
-          <p:cNvPr id="27" name="TextBox 26"/>
+          <p:cNvPr id="32" name="TextBox 31"/>
           <p:cNvSpPr txBox="1"/>
           <p:nvPr/>
         </p:nvSpPr>
@@ -12318,7 +12730,7 @@
       </p:sp>
       <p:sp>
         <p:nvSpPr>
-          <p:cNvPr id="28" name="TextBox 27"/>
+          <p:cNvPr id="33" name="TextBox 32"/>
           <p:cNvSpPr txBox="1"/>
           <p:nvPr/>
         </p:nvSpPr>
@@ -13735,7 +14147,7 @@
                 <a:ea typeface="Pretendard"/>
                 <a:cs typeface="Pretendard"/>
               </a:rPr>
-              <a:t>4건만 넣고 기다려 본다 — 파일이 안 생긴다</a:t>
+              <a:t>behavior.on.null.values 를 빼고 등록하면</a:t>
             </a:r>
           </a:p>
         </p:txBody>
@@ -13806,7 +14218,7 @@
                 <a:ea typeface="Pretendard"/>
                 <a:cs typeface="Pretendard"/>
               </a:rPr>
-              <a:t>INSERT 4건 뒤 mc ls</a:t>
+              <a:t>빼면 — 태스크 FAILED</a:t>
             </a:r>
           </a:p>
         </p:txBody>
@@ -13847,7 +14259,7 @@
                 <a:ea typeface="Pretendard"/>
                 <a:cs typeface="Pretendard"/>
               </a:rPr>
-              <a:t>커넥터는 RUNNING 인데 버킷은 비어 있다</a:t>
+              <a:t>커넥터는 RUNNING 인데 tasks[0] 가 FAILED</a:t>
             </a:r>
           </a:p>
         </p:txBody>
@@ -13952,7 +14364,7 @@
                 <a:ea typeface="Pretendard"/>
                 <a:cs typeface="Pretendard"/>
               </a:rPr>
-              <a:t>status 는 RUNNING</a:t>
+              <a:t>trace 끝: Null valued records are not writeable</a:t>
             </a:r>
           </a:p>
         </p:txBody>
@@ -14023,7 +14435,7 @@
                 <a:ea typeface="Pretendard"/>
                 <a:cs typeface="Pretendard"/>
               </a:rPr>
-              <a:t>터미널 1 에는 이벤트가 바로 보인다</a:t>
+              <a:t>6-4 DELETE 뒤 툼스톤(값 없음)이 원인</a:t>
             </a:r>
           </a:p>
         </p:txBody>
@@ -14094,7 +14506,7 @@
                 <a:ea typeface="Pretendard"/>
                 <a:cs typeface="Pretendard"/>
               </a:rPr>
-              <a:t>mc ls 는 비어 있다 — 고장이 아니다</a:t>
+              <a:t>파일에 쓸 수 없는 메시지라 멈춘다</a:t>
             </a:r>
           </a:p>
         </p:txBody>
@@ -14135,7 +14547,7 @@
                 <a:ea typeface="Pretendard"/>
                 <a:cs typeface="Pretendard"/>
               </a:rPr>
-              <a:t>1건 더 넣으면</a:t>
+              <a:t>"ignore" 를 넣으면</a:t>
             </a:r>
           </a:p>
         </p:txBody>
@@ -14176,7 +14588,7 @@
                 <a:ea typeface="Pretendard"/>
                 <a:cs typeface="Pretendard"/>
               </a:rPr>
-              <a:t>5건이 차는 순간 파일 하나가 생긴다</a:t>
+              <a:t>그 메시지만 건너뛰고 RUNNING</a:t>
             </a:r>
           </a:p>
         </p:txBody>
@@ -14281,7 +14693,7 @@
                 <a:ea typeface="Pretendard"/>
                 <a:cs typeface="Pretendard"/>
               </a:rPr>
-              <a:t>flush.size 만큼 모여야 쓴다</a:t>
+              <a:t>DELETE 이벤트(op=d)는 값이 있어 쌓인다</a:t>
             </a:r>
           </a:p>
         </p:txBody>
@@ -14352,7 +14764,7 @@
                 <a:ea typeface="Pretendard"/>
                 <a:cs typeface="Pretendard"/>
               </a:rPr>
-              <a:t>Kafka 까지는 즉시, 파일은 나중</a:t>
+              <a:t>파일 이름 0 → 6 — 건너뛴 자리</a:t>
             </a:r>
           </a:p>
         </p:txBody>
@@ -14423,7 +14835,7 @@
                 <a:ea typeface="Pretendard"/>
                 <a:cs typeface="Pretendard"/>
               </a:rPr>
-              <a:t>topics 이름 오타도 같은 증상</a:t>
+              <a:t>고치려면 DELETE 로 지우고 다시 등록</a:t>
             </a:r>
           </a:p>
         </p:txBody>
@@ -16205,7 +16617,7 @@
                 <a:ea typeface="Pretendard"/>
                 <a:cs typeface="Pretendard"/>
               </a:rPr>
-              <a:t>대부분 (2) 토픽 이름 오타나 (1) 버킷·자격증명 문제 — 순서대로 짚는 습관을 들인다</a:t>
+              <a:t>(4) LAG 1~4 는 정상(실측 1) — 아직 flush.size 를 못 채워 들고 있는 것 · 대부분 (2) 토픽 오타나 (1) 버킷·자격증명</a:t>
             </a:r>
           </a:p>
         </p:txBody>
